--- a/ppt/Datascience13-ScikitLearn.pptx
+++ b/ppt/Datascience13-ScikitLearn.pptx
@@ -4026,7 +4026,7 @@
           <a:p>
             <a:r>
               <a:rPr lang="fr-FR" dirty="0"/>
-              <a:t>D’où l’utiliser d’un </a:t>
+              <a:t>Utiliser d’un </a:t>
             </a:r>
             <a:r>
               <a:rPr lang="fr-FR" dirty="0" err="1"/>
